--- a/gallery/renders/two_column_split_complex.pptx
+++ b/gallery/renders/two_column_split_complex.pptx
@@ -46,12 +46,14 @@
           <a:bodyPr wrap="square" lIns="0" rIns="0" tIns="0" bIns="0"/>
           <a:lstStyle/>
           <a:p>
-            <a:pPr algn="l"/>
+            <a:pPr algn="l">
+              <a:buNone/>
+            </a:pPr>
             <a:r>
               <a:rPr lang="en-US" sz="2100">
                 <a:latin typeface="Arial"/>
               </a:rPr>
-              <a:t>This is a much narrower left column because the split is 0.3. This is a much narrower left column because the split is 0.3. This is a much narrower left column because the split is 0.3. This is a much narrower left column because the split is 0.3. This is a much narrower left column because the split is 0.3. </a:t>
+              <a:t>This is a much narrower left column because the split is 0.3. This is a much narrower left column because the split is 0.3. This is a much narrower left column because the split is 0.3. This is a much narrower left column because the split is 0.3. This is a much narrower left column because the split is 0.3.</a:t>
             </a:r>
           </a:p>
         </p:txBody>
@@ -76,12 +78,14 @@
           <a:bodyPr wrap="square" lIns="0" rIns="0" tIns="0" bIns="0"/>
           <a:lstStyle/>
           <a:p>
-            <a:pPr algn="l"/>
+            <a:pPr algn="l">
+              <a:buNone/>
+            </a:pPr>
             <a:r>
               <a:rPr lang="en-US" sz="2200">
                 <a:latin typeface="Arial"/>
               </a:rPr>
-              <a:t>This is the right column, which should be significantly wider. This is the right column, which should be significantly wider. This is the right column, which should be significantly wider. This is the right column, which should be significantly wider. This is the right column, which should be significantly wider. This is the right column, which should be significantly wider. This is the right column, which should be significantly wider. This is the right column, which should be significantly wider. This is the right column, which should be significantly wider. This is the right column, which should be significantly wider. </a:t>
+              <a:t>This is the right column, which should be significantly wider. This is the right column, which should be significantly wider. This is the right column, which should be significantly wider. This is the right column, which should be significantly wider. This is the right column, which should be significantly wider. This is the right column, which should be significantly wider. This is the right column, which should be significantly wider. This is the right column, which should be significantly wider. This is the right column, which should be significantly wider. This is the right column, which should be significantly wider.</a:t>
             </a:r>
           </a:p>
         </p:txBody>
@@ -106,7 +110,9 @@
           <a:bodyPr wrap="square" lIns="0" rIns="0" tIns="0" bIns="0"/>
           <a:lstStyle/>
           <a:p>
-            <a:pPr algn="l"/>
+            <a:pPr algn="l">
+              <a:buNone/>
+            </a:pPr>
             <a:r>
               <a:rPr lang="en-US" sz="3600" b="1">
                 <a:latin typeface="Arial"/>

--- a/gallery/renders/two_column_split_complex.pptx
+++ b/gallery/renders/two_column_split_complex.pptx
@@ -35,7 +35,7 @@
         <p:spPr>
           <a:xfrm>
             <a:off x="910336" y="1806854"/>
-            <a:ext cx="3095142" cy="4952390"/>
+            <a:ext cx="3095142" cy="4800601"/>
           </a:xfrm>
           <a:prstGeom prst="rect">
             <a:avLst/>
@@ -67,7 +67,7 @@
         <p:spPr>
           <a:xfrm>
             <a:off x="4525670" y="1806854"/>
-            <a:ext cx="7568793" cy="4952390"/>
+            <a:ext cx="7568793" cy="4023360"/>
           </a:xfrm>
           <a:prstGeom prst="rect">
             <a:avLst/>
@@ -99,7 +99,7 @@
         <p:spPr>
           <a:xfrm>
             <a:off x="910336" y="460857"/>
-            <a:ext cx="11184128" cy="1046073"/>
+            <a:ext cx="11184128" cy="548640"/>
           </a:xfrm>
           <a:prstGeom prst="rect">
             <a:avLst/>

--- a/gallery/renders/two_column_split_complex.pptx
+++ b/gallery/renders/two_column_split_complex.pptx
@@ -35,7 +35,7 @@
         <p:spPr>
           <a:xfrm>
             <a:off x="910336" y="1806854"/>
-            <a:ext cx="3095142" cy="4800601"/>
+            <a:ext cx="3095142" cy="4800600"/>
           </a:xfrm>
           <a:prstGeom prst="rect">
             <a:avLst/>

--- a/gallery/renders/two_column_split_complex.pptx
+++ b/gallery/renders/two_column_split_complex.pptx
@@ -35,7 +35,7 @@
         <p:spPr>
           <a:xfrm>
             <a:off x="910336" y="1806854"/>
-            <a:ext cx="3095142" cy="4800600"/>
+            <a:ext cx="3095142" cy="4160520"/>
           </a:xfrm>
           <a:prstGeom prst="rect">
             <a:avLst/>
@@ -67,7 +67,7 @@
         <p:spPr>
           <a:xfrm>
             <a:off x="4525670" y="1806854"/>
-            <a:ext cx="7568793" cy="4023360"/>
+            <a:ext cx="7568793" cy="3352800"/>
           </a:xfrm>
           <a:prstGeom prst="rect">
             <a:avLst/>
